--- a/dist/초1/수학/모양과비교/초1_수학_모양과비교_01_상자·둥근기둥·공모양_학생용.pptx
+++ b/dist/초1/수학/모양과비교/초1_수학_모양과비교_01_상자·둥근기둥·공모양_학생용.pptx
@@ -120,13 +120,13 @@
   <p:extLst>
     <p:ext uri="{521415D9-36F7-43E2-AB2F-B90AF26B5E84}">
       <p14:sectionLst xmlns:p14="http://schemas.microsoft.com/office/powerpoint/2010/main">
-        <p14:section name="도입" id="{8cb87bb0-8925-8ca1-6bd8-edb12299435a}">
+        <p14:section name="도입" id="{0f5f9bfb-ad96-2886-cdff-ffec71b3504a}">
           <p14:sldIdLst>
             <p14:sldId id="256"/>
             <p14:sldId id="257"/>
           </p14:sldIdLst>
         </p14:section>
-        <p14:section name="개념" id="{e8842fab-6475-ea3b-d58f-0fde4d9b895f}">
+        <p14:section name="개념" id="{b459650f-c634-00c7-9c57-9cd6cc7e709f}">
           <p14:sldIdLst>
             <p14:sldId id="258"/>
             <p14:sldId id="259"/>
@@ -135,25 +135,25 @@
             <p14:sldId id="262"/>
           </p14:sldIdLst>
         </p14:section>
-        <p14:section name="연습" id="{34cc69dd-c046-23c0-03ff-a1addc1c281a}">
+        <p14:section name="연습" id="{3368fcb0-ee12-35f4-87a6-acf7c7a074df}">
           <p14:sldIdLst>
             <p14:sldId id="263"/>
             <p14:sldId id="264"/>
             <p14:sldId id="265"/>
           </p14:sldIdLst>
         </p14:section>
-        <p14:section name="확인" id="{ea7e4372-302c-748e-3daf-87d5b8fa1ffa}">
+        <p14:section name="확인" id="{d41e638e-e5ba-322e-a0e9-9a667e32c1e3}">
           <p14:sldIdLst>
             <p14:sldId id="266"/>
             <p14:sldId id="267"/>
           </p14:sldIdLst>
         </p14:section>
-        <p14:section name="정리" id="{129292e9-82b8-5795-822a-8e6e6500831c}">
+        <p14:section name="정리" id="{e214cb78-cad3-edbb-617d-cf4c9d472e70}">
           <p14:sldIdLst>
             <p14:sldId id="268"/>
           </p14:sldIdLst>
         </p14:section>
-        <p14:section name="보충" id="{8a85334a-ab77-c3a1-77f4-c9a193713044}">
+        <p14:section name="보충" id="{8be51aef-1eef-610c-14a0-7d2e07eb20a8}">
           <p14:sldIdLst>
             <p14:sldId id="269"/>
           </p14:sldIdLst>

--- a/dist/초1/수학/모양과비교/초1_수학_모양과비교_01_상자·둥근기둥·공모양_학생용.pptx
+++ b/dist/초1/수학/모양과비교/초1_수학_모양과비교_01_상자·둥근기둥·공모양_학생용.pptx
@@ -120,13 +120,13 @@
   <p:extLst>
     <p:ext uri="{521415D9-36F7-43E2-AB2F-B90AF26B5E84}">
       <p14:sectionLst xmlns:p14="http://schemas.microsoft.com/office/powerpoint/2010/main">
-        <p14:section name="도입" id="{0f5f9bfb-ad96-2886-cdff-ffec71b3504a}">
+        <p14:section name="도입" id="{c42ce1e3-e4c1-cbdd-84b2-19a7dd17492a}">
           <p14:sldIdLst>
             <p14:sldId id="256"/>
             <p14:sldId id="257"/>
           </p14:sldIdLst>
         </p14:section>
-        <p14:section name="개념" id="{b459650f-c634-00c7-9c57-9cd6cc7e709f}">
+        <p14:section name="개념" id="{99681e2f-0456-0a6d-1eff-bfdde31fa36a}">
           <p14:sldIdLst>
             <p14:sldId id="258"/>
             <p14:sldId id="259"/>
@@ -135,25 +135,25 @@
             <p14:sldId id="262"/>
           </p14:sldIdLst>
         </p14:section>
-        <p14:section name="연습" id="{3368fcb0-ee12-35f4-87a6-acf7c7a074df}">
+        <p14:section name="연습" id="{ac38378d-899b-575c-a68a-8805f216738d}">
           <p14:sldIdLst>
             <p14:sldId id="263"/>
             <p14:sldId id="264"/>
             <p14:sldId id="265"/>
           </p14:sldIdLst>
         </p14:section>
-        <p14:section name="확인" id="{d41e638e-e5ba-322e-a0e9-9a667e32c1e3}">
+        <p14:section name="확인" id="{f810652f-ddf9-040d-afcb-ed8fa652c447}">
           <p14:sldIdLst>
             <p14:sldId id="266"/>
             <p14:sldId id="267"/>
           </p14:sldIdLst>
         </p14:section>
-        <p14:section name="정리" id="{e214cb78-cad3-edbb-617d-cf4c9d472e70}">
+        <p14:section name="정리" id="{bb42cea7-b3fb-9e8d-5d6f-e996c9a97336}">
           <p14:sldIdLst>
             <p14:sldId id="268"/>
           </p14:sldIdLst>
         </p14:section>
-        <p14:section name="보충" id="{8be51aef-1eef-610c-14a0-7d2e07eb20a8}">
+        <p14:section name="보충" id="{d3c8824b-fb61-c2c1-ee3e-7b33f279801e}">
           <p14:sldIdLst>
             <p14:sldId id="269"/>
           </p14:sldIdLst>
@@ -7664,7 +7664,7 @@
           </p:nvPr>
         </p:nvGraphicFramePr>
         <p:xfrm>
-          <a:off x="836676" y="2166620"/>
+          <a:off x="836676" y="2199640"/>
           <a:ext cx="10515600" cy="914400"/>
         </p:xfrm>
         <a:graphic>
@@ -7676,7 +7676,7 @@
                 <a:gridCol w="3364992"/>
                 <a:gridCol w="3785616"/>
               </a:tblGrid>
-              <a:tr h="528320">
+              <a:tr h="511810">
                 <a:tc>
                   <a:txBody>
                     <a:bodyPr/>
@@ -7882,7 +7882,7 @@
                   </a:tcPr>
                 </a:tc>
               </a:tr>
-              <a:tr h="528320">
+              <a:tr h="511810">
                 <a:tc>
                   <a:txBody>
                     <a:bodyPr/>
@@ -8088,7 +8088,7 @@
                   </a:tcPr>
                 </a:tc>
               </a:tr>
-              <a:tr h="528320">
+              <a:tr h="511810">
                 <a:tc>
                   <a:txBody>
                     <a:bodyPr/>
@@ -8294,7 +8294,7 @@
                   </a:tcPr>
                 </a:tc>
               </a:tr>
-              <a:tr h="528320">
+              <a:tr h="511810">
                 <a:tc>
                   <a:txBody>
                     <a:bodyPr/>
